--- a/sidemeetings/ietf125/0-T4SAT-Agenda.pptx
+++ b/sidemeetings/ietf125/0-T4SAT-Agenda.pptx
@@ -5805,7 +5805,7 @@
         <p:spPr>
           <a:xfrm>
             <a:off x="472440" y="1735454"/>
-            <a:ext cx="11247119" cy="3355277"/>
+            <a:ext cx="11247119" cy="3049905"/>
           </a:xfrm>
           <a:prstGeom prst="rect">
             <a:avLst/>
@@ -6122,67 +6122,18 @@
               <a:t>space, </a:t>
             </a:r>
             <a:r>
-              <a:rPr sz="2000" spc="-15" dirty="0">
-                <a:latin typeface="Calibri" panose="020F0502020204030204"/>
-                <a:cs typeface="Calibri" panose="020F0502020204030204"/>
-              </a:rPr>
-              <a:t>are </a:t>
-            </a:r>
-            <a:r>
-              <a:rPr sz="2000" spc="-10" dirty="0">
-                <a:latin typeface="Calibri" panose="020F0502020204030204"/>
-                <a:cs typeface="Calibri" panose="020F0502020204030204"/>
-              </a:rPr>
-              <a:t>there </a:t>
-            </a:r>
-            <a:r>
-              <a:rPr sz="2000" spc="-15" dirty="0">
-                <a:latin typeface="Calibri" panose="020F0502020204030204"/>
-                <a:cs typeface="Calibri" panose="020F0502020204030204"/>
-              </a:rPr>
-              <a:t>any </a:t>
-            </a:r>
-            <a:r>
-              <a:rPr lang="en-US" sz="2000" spc="-15" dirty="0">
-                <a:latin typeface="Calibri" panose="020F0502020204030204"/>
-                <a:cs typeface="Calibri" panose="020F0502020204030204"/>
-              </a:rPr>
-              <a:t>transportation layer optimizations </a:t>
-            </a:r>
-            <a:r>
-              <a:rPr sz="2000" spc="-5" dirty="0">
-                <a:latin typeface="Calibri" panose="020F0502020204030204"/>
-                <a:cs typeface="Calibri" panose="020F0502020204030204"/>
-              </a:rPr>
-              <a:t>not </a:t>
-            </a:r>
-            <a:r>
-              <a:rPr sz="2000" spc="-15" dirty="0">
-                <a:latin typeface="Calibri" panose="020F0502020204030204"/>
-                <a:cs typeface="Calibri" panose="020F0502020204030204"/>
-              </a:rPr>
-              <a:t>yet </a:t>
-            </a:r>
-            <a:r>
-              <a:rPr sz="2000" spc="-10" dirty="0">
-                <a:latin typeface="Calibri" panose="020F0502020204030204"/>
-                <a:cs typeface="Calibri" panose="020F0502020204030204"/>
-              </a:rPr>
-              <a:t>considered by</a:t>
-            </a:r>
-            <a:r>
-              <a:rPr sz="2000" spc="100" dirty="0">
-                <a:latin typeface="Calibri" panose="020F0502020204030204"/>
-                <a:cs typeface="Calibri" panose="020F0502020204030204"/>
-              </a:rPr>
-              <a:t> </a:t>
+              <a:rPr lang="en-US" sz="2000" spc="-5" dirty="0">
+                <a:latin typeface="Calibri" panose="020F0502020204030204"/>
+                <a:cs typeface="Calibri" panose="020F0502020204030204"/>
+              </a:rPr>
+              <a:t> transportation layer OAM be necessary</a:t>
             </a:r>
             <a:r>
               <a:rPr sz="2000" spc="-20" dirty="0">
                 <a:latin typeface="Calibri" panose="020F0502020204030204"/>
                 <a:cs typeface="Calibri" panose="020F0502020204030204"/>
               </a:rPr>
-              <a:t>TCP/QUIC?</a:t>
+              <a:t>?</a:t>
             </a:r>
             <a:endParaRPr sz="2000" dirty="0">
               <a:latin typeface="Calibri" panose="020F0502020204030204"/>
